--- a/docs/AI Posture Rep Assistant.pptx
+++ b/docs/AI Posture Rep Assistant.pptx
@@ -11484,7 +11484,7 @@
         <p:spPr>
           <a:xfrm>
             <a:off x="609599" y="2218766"/>
-            <a:ext cx="9650507" cy="4639234"/>
+            <a:ext cx="11222517" cy="4639234"/>
           </a:xfrm>
           <a:prstGeom prst="rect">
             <a:avLst/>
@@ -11708,8 +11708,38 @@
         </p:blipFill>
         <p:spPr>
           <a:xfrm>
-            <a:off x="851647" y="2434698"/>
-            <a:ext cx="9126071" cy="4087125"/>
+            <a:off x="851648" y="2434698"/>
+            <a:ext cx="5244352" cy="4087125"/>
+          </a:xfrm>
+          <a:prstGeom prst="rect">
+            <a:avLst/>
+          </a:prstGeom>
+        </p:spPr>
+      </p:pic>
+      <p:pic>
+        <p:nvPicPr>
+          <p:cNvPr id="2" name="Picture 1">
+            <a:extLst>
+              <a:ext uri="{FF2B5EF4-FFF2-40B4-BE49-F238E27FC236}">
+                <a16:creationId xmlns:a16="http://schemas.microsoft.com/office/drawing/2014/main" id="{24945781-19E5-7981-0D0F-44CE8C6C868C}"/>
+              </a:ext>
+            </a:extLst>
+          </p:cNvPr>
+          <p:cNvPicPr>
+            <a:picLocks noChangeAspect="1"/>
+          </p:cNvPicPr>
+          <p:nvPr/>
+        </p:nvPicPr>
+        <p:blipFill>
+          <a:blip r:embed="rId3"/>
+          <a:stretch>
+            <a:fillRect/>
+          </a:stretch>
+        </p:blipFill>
+        <p:spPr>
+          <a:xfrm>
+            <a:off x="6282694" y="2434698"/>
+            <a:ext cx="5451188" cy="4087125"/>
           </a:xfrm>
           <a:prstGeom prst="rect">
             <a:avLst/>
